--- a/presentations/2.1_Osobennosti_organizatsii_uchebnogo_protsessa.pptx
+++ b/presentations/2.1_Osobennosti_organizatsii_uchebnogo_protsessa.pptx
@@ -24967,7 +24967,7 @@
           </a:ln>
           <a:extLst>
             <a:ext uri="{C572A759-6A51-4108-AA02-DFA0A04FC94B}">
-              <ma14:wrappingTextBoxFlag xmlns="" xmlns:m="http://schemas.openxmlformats.org/officeDocument/2006/math" xmlns:a14="http://schemas.microsoft.com/office/drawing/2010/main" xmlns:ma14="http://schemas.microsoft.com/office/mac/drawingml/2011/main" val="1"/>
+              <ma14:wrappingTextBoxFlag xmlns:ma14="http://schemas.microsoft.com/office/mac/drawingml/2011/main" xmlns:a14="http://schemas.microsoft.com/office/drawing/2010/main" xmlns:m="http://schemas.openxmlformats.org/officeDocument/2006/math" xmlns="" val="1"/>
             </a:ext>
           </a:extLst>
         </p:spPr>
@@ -25006,7 +25006,7 @@
           </a:ln>
           <a:extLst>
             <a:ext uri="{C572A759-6A51-4108-AA02-DFA0A04FC94B}">
-              <ma14:wrappingTextBoxFlag xmlns="" xmlns:m="http://schemas.openxmlformats.org/officeDocument/2006/math" xmlns:a14="http://schemas.microsoft.com/office/drawing/2010/main" xmlns:ma14="http://schemas.microsoft.com/office/mac/drawingml/2011/main" val="1"/>
+              <ma14:wrappingTextBoxFlag xmlns:ma14="http://schemas.microsoft.com/office/mac/drawingml/2011/main" xmlns:a14="http://schemas.microsoft.com/office/drawing/2010/main" xmlns:m="http://schemas.openxmlformats.org/officeDocument/2006/math" xmlns="" val="1"/>
             </a:ext>
           </a:extLst>
         </p:spPr>
@@ -25985,7 +25985,7 @@
           </a:ln>
           <a:extLst>
             <a:ext uri="{C572A759-6A51-4108-AA02-DFA0A04FC94B}">
-              <ma14:wrappingTextBoxFlag xmlns="" xmlns:m="http://schemas.openxmlformats.org/officeDocument/2006/math" xmlns:a14="http://schemas.microsoft.com/office/drawing/2010/main" xmlns:ma14="http://schemas.microsoft.com/office/mac/drawingml/2011/main" val="1"/>
+              <ma14:wrappingTextBoxFlag xmlns:ma14="http://schemas.microsoft.com/office/mac/drawingml/2011/main" xmlns:a14="http://schemas.microsoft.com/office/drawing/2010/main" xmlns:m="http://schemas.openxmlformats.org/officeDocument/2006/math" xmlns="" val="1"/>
             </a:ext>
           </a:extLst>
         </p:spPr>
@@ -26396,7 +26396,7 @@
           </a:effectLst>
           <a:extLst>
             <a:ext uri="{C572A759-6A51-4108-AA02-DFA0A04FC94B}">
-              <ma14:wrappingTextBoxFlag xmlns="" xmlns:m="http://schemas.openxmlformats.org/officeDocument/2006/math" xmlns:a14="http://schemas.microsoft.com/office/drawing/2010/main" xmlns:ma14="http://schemas.microsoft.com/office/mac/drawingml/2011/main" val="1"/>
+              <ma14:wrappingTextBoxFlag xmlns:ma14="http://schemas.microsoft.com/office/mac/drawingml/2011/main" xmlns:a14="http://schemas.microsoft.com/office/drawing/2010/main" xmlns:m="http://schemas.openxmlformats.org/officeDocument/2006/math" xmlns="" val="1"/>
             </a:ext>
           </a:extLst>
         </p:spPr>
@@ -26446,7 +26446,7 @@
           </a:ln>
           <a:extLst>
             <a:ext uri="{C572A759-6A51-4108-AA02-DFA0A04FC94B}">
-              <ma14:wrappingTextBoxFlag xmlns:ma14="http://schemas.microsoft.com/office/mac/drawingml/2011/main" xmlns:a14="http://schemas.microsoft.com/office/drawing/2010/main" xmlns:m="http://schemas.openxmlformats.org/officeDocument/2006/math" xmlns="" val="1"/>
+              <ma14:wrappingTextBoxFlag xmlns="" xmlns:m="http://schemas.openxmlformats.org/officeDocument/2006/math" xmlns:a14="http://schemas.microsoft.com/office/drawing/2010/main" xmlns:ma14="http://schemas.microsoft.com/office/mac/drawingml/2011/main" val="1"/>
             </a:ext>
           </a:extLst>
         </p:spPr>
@@ -26696,7 +26696,7 @@
           </a:effectLst>
           <a:extLst>
             <a:ext uri="{C572A759-6A51-4108-AA02-DFA0A04FC94B}">
-              <ma14:wrappingTextBoxFlag xmlns:ma14="http://schemas.microsoft.com/office/mac/drawingml/2011/main" xmlns:a14="http://schemas.microsoft.com/office/drawing/2010/main" xmlns:m="http://schemas.openxmlformats.org/officeDocument/2006/math" xmlns="" val="1"/>
+              <ma14:wrappingTextBoxFlag xmlns="" xmlns:m="http://schemas.openxmlformats.org/officeDocument/2006/math" xmlns:a14="http://schemas.microsoft.com/office/drawing/2010/main" xmlns:ma14="http://schemas.microsoft.com/office/mac/drawingml/2011/main" val="1"/>
             </a:ext>
           </a:extLst>
         </p:spPr>
@@ -26746,7 +26746,7 @@
           </a:ln>
           <a:extLst>
             <a:ext uri="{C572A759-6A51-4108-AA02-DFA0A04FC94B}">
-              <ma14:wrappingTextBoxFlag xmlns="" xmlns:m="http://schemas.openxmlformats.org/officeDocument/2006/math" xmlns:a14="http://schemas.microsoft.com/office/drawing/2010/main" xmlns:ma14="http://schemas.microsoft.com/office/mac/drawingml/2011/main" val="1"/>
+              <ma14:wrappingTextBoxFlag xmlns:ma14="http://schemas.microsoft.com/office/mac/drawingml/2011/main" xmlns:a14="http://schemas.microsoft.com/office/drawing/2010/main" xmlns:m="http://schemas.openxmlformats.org/officeDocument/2006/math" xmlns="" val="1"/>
             </a:ext>
           </a:extLst>
         </p:spPr>
@@ -28355,7 +28355,7 @@
           </a:effectLst>
           <a:extLst>
             <a:ext uri="{C572A759-6A51-4108-AA02-DFA0A04FC94B}">
-              <ma14:wrappingTextBoxFlag xmlns="" xmlns:m="http://schemas.openxmlformats.org/officeDocument/2006/math" xmlns:a14="http://schemas.microsoft.com/office/drawing/2010/main" xmlns:ma14="http://schemas.microsoft.com/office/mac/drawingml/2011/main" val="1"/>
+              <ma14:wrappingTextBoxFlag xmlns:ma14="http://schemas.microsoft.com/office/mac/drawingml/2011/main" xmlns:a14="http://schemas.microsoft.com/office/drawing/2010/main" xmlns:m="http://schemas.openxmlformats.org/officeDocument/2006/math" xmlns="" val="1"/>
             </a:ext>
           </a:extLst>
         </p:spPr>
@@ -28405,7 +28405,7 @@
           </a:ln>
           <a:extLst>
             <a:ext uri="{C572A759-6A51-4108-AA02-DFA0A04FC94B}">
-              <ma14:wrappingTextBoxFlag xmlns:ma14="http://schemas.microsoft.com/office/mac/drawingml/2011/main" xmlns:a14="http://schemas.microsoft.com/office/drawing/2010/main" xmlns:m="http://schemas.openxmlformats.org/officeDocument/2006/math" xmlns="" val="1"/>
+              <ma14:wrappingTextBoxFlag xmlns="" xmlns:m="http://schemas.openxmlformats.org/officeDocument/2006/math" xmlns:a14="http://schemas.microsoft.com/office/drawing/2010/main" xmlns:ma14="http://schemas.microsoft.com/office/mac/drawingml/2011/main" val="1"/>
             </a:ext>
           </a:extLst>
         </p:spPr>
@@ -29912,7 +29912,7 @@
           </a:effectLst>
           <a:extLst>
             <a:ext uri="{C572A759-6A51-4108-AA02-DFA0A04FC94B}">
-              <ma14:wrappingTextBoxFlag xmlns:ma14="http://schemas.microsoft.com/office/mac/drawingml/2011/main" xmlns:a14="http://schemas.microsoft.com/office/drawing/2010/main" xmlns:m="http://schemas.openxmlformats.org/officeDocument/2006/math" xmlns="" val="1"/>
+              <ma14:wrappingTextBoxFlag xmlns="" xmlns:m="http://schemas.openxmlformats.org/officeDocument/2006/math" xmlns:a14="http://schemas.microsoft.com/office/drawing/2010/main" xmlns:ma14="http://schemas.microsoft.com/office/mac/drawingml/2011/main" val="1"/>
             </a:ext>
           </a:extLst>
         </p:spPr>
@@ -29962,7 +29962,7 @@
           </a:ln>
           <a:extLst>
             <a:ext uri="{C572A759-6A51-4108-AA02-DFA0A04FC94B}">
-              <ma14:wrappingTextBoxFlag xmlns="" xmlns:m="http://schemas.openxmlformats.org/officeDocument/2006/math" xmlns:a14="http://schemas.microsoft.com/office/drawing/2010/main" xmlns:ma14="http://schemas.microsoft.com/office/mac/drawingml/2011/main" val="1"/>
+              <ma14:wrappingTextBoxFlag xmlns:ma14="http://schemas.microsoft.com/office/mac/drawingml/2011/main" xmlns:a14="http://schemas.microsoft.com/office/drawing/2010/main" xmlns:m="http://schemas.openxmlformats.org/officeDocument/2006/math" xmlns="" val="1"/>
             </a:ext>
           </a:extLst>
         </p:spPr>
@@ -30537,7 +30537,7 @@
           </a:effectLst>
           <a:extLst>
             <a:ext uri="{C572A759-6A51-4108-AA02-DFA0A04FC94B}">
-              <ma14:wrappingTextBoxFlag xmlns="" xmlns:m="http://schemas.openxmlformats.org/officeDocument/2006/math" xmlns:a14="http://schemas.microsoft.com/office/drawing/2010/main" xmlns:ma14="http://schemas.microsoft.com/office/mac/drawingml/2011/main" val="1"/>
+              <ma14:wrappingTextBoxFlag xmlns:ma14="http://schemas.microsoft.com/office/mac/drawingml/2011/main" xmlns:a14="http://schemas.microsoft.com/office/drawing/2010/main" xmlns:m="http://schemas.openxmlformats.org/officeDocument/2006/math" xmlns="" val="1"/>
             </a:ext>
           </a:extLst>
         </p:spPr>
@@ -30587,7 +30587,7 @@
           </a:ln>
           <a:extLst>
             <a:ext uri="{C572A759-6A51-4108-AA02-DFA0A04FC94B}">
-              <ma14:wrappingTextBoxFlag xmlns:ma14="http://schemas.microsoft.com/office/mac/drawingml/2011/main" xmlns:a14="http://schemas.microsoft.com/office/drawing/2010/main" xmlns:m="http://schemas.openxmlformats.org/officeDocument/2006/math" xmlns="" val="1"/>
+              <ma14:wrappingTextBoxFlag xmlns="" xmlns:m="http://schemas.openxmlformats.org/officeDocument/2006/math" xmlns:a14="http://schemas.microsoft.com/office/drawing/2010/main" xmlns:ma14="http://schemas.microsoft.com/office/mac/drawingml/2011/main" val="1"/>
             </a:ext>
           </a:extLst>
         </p:spPr>
@@ -30837,7 +30837,7 @@
           </a:effectLst>
           <a:extLst>
             <a:ext uri="{C572A759-6A51-4108-AA02-DFA0A04FC94B}">
-              <ma14:wrappingTextBoxFlag xmlns:ma14="http://schemas.microsoft.com/office/mac/drawingml/2011/main" xmlns:a14="http://schemas.microsoft.com/office/drawing/2010/main" xmlns:m="http://schemas.openxmlformats.org/officeDocument/2006/math" xmlns="" val="1"/>
+              <ma14:wrappingTextBoxFlag xmlns="" xmlns:m="http://schemas.openxmlformats.org/officeDocument/2006/math" xmlns:a14="http://schemas.microsoft.com/office/drawing/2010/main" xmlns:ma14="http://schemas.microsoft.com/office/mac/drawingml/2011/main" val="1"/>
             </a:ext>
           </a:extLst>
         </p:spPr>
@@ -30887,7 +30887,7 @@
           </a:ln>
           <a:extLst>
             <a:ext uri="{C572A759-6A51-4108-AA02-DFA0A04FC94B}">
-              <ma14:wrappingTextBoxFlag xmlns="" xmlns:m="http://schemas.openxmlformats.org/officeDocument/2006/math" xmlns:a14="http://schemas.microsoft.com/office/drawing/2010/main" xmlns:ma14="http://schemas.microsoft.com/office/mac/drawingml/2011/main" val="1"/>
+              <ma14:wrappingTextBoxFlag xmlns:ma14="http://schemas.microsoft.com/office/mac/drawingml/2011/main" xmlns:a14="http://schemas.microsoft.com/office/drawing/2010/main" xmlns:m="http://schemas.openxmlformats.org/officeDocument/2006/math" xmlns="" val="1"/>
             </a:ext>
           </a:extLst>
         </p:spPr>
@@ -31625,7 +31625,7 @@
           </a:ln>
           <a:extLst>
             <a:ext uri="{C572A759-6A51-4108-AA02-DFA0A04FC94B}">
-              <ma14:wrappingTextBoxFlag xmlns="" xmlns:m="http://schemas.openxmlformats.org/officeDocument/2006/math" xmlns:a14="http://schemas.microsoft.com/office/drawing/2010/main" xmlns:ma14="http://schemas.microsoft.com/office/mac/drawingml/2011/main" val="1"/>
+              <ma14:wrappingTextBoxFlag xmlns:ma14="http://schemas.microsoft.com/office/mac/drawingml/2011/main" xmlns:a14="http://schemas.microsoft.com/office/drawing/2010/main" xmlns:m="http://schemas.openxmlformats.org/officeDocument/2006/math" xmlns="" val="1"/>
             </a:ext>
           </a:extLst>
         </p:spPr>
